--- a/entregas/creditos_cursos_4_5/C4_M1_02_Agilidad_mas_alla_de_las_herramientas_COMPLETO_con_creditos.pptx
+++ b/entregas/creditos_cursos_4_5/C4_M1_02_Agilidad_mas_alla_de_las_herramientas_COMPLETO_con_creditos.pptx
@@ -29712,7 +29712,7 @@
                           <a:cs typeface="Arial"/>
                           <a:sym typeface="Arial"/>
                         </a:rPr>
-                        <a:t>Coordinación general</a:t>
+                        <a:t>Coordinación general:</a:t>
                       </a:r>
                       <a:endParaRPr b="1" sz="1100" u="none" cap="none" strike="noStrike">
                         <a:latin typeface="Arial"/>
@@ -29807,7 +29807,7 @@
                           <a:cs typeface="Arial"/>
                           <a:sym typeface="Arial"/>
                         </a:rPr>
-                        <a:t>Experto temático</a:t>
+                        <a:t>Experto temático:</a:t>
                       </a:r>
                       <a:endParaRPr b="1" sz="1100" u="none" cap="none" strike="noStrike">
                         <a:latin typeface="Arial"/>
@@ -29902,7 +29902,7 @@
                           <a:cs typeface="Arial"/>
                           <a:sym typeface="Arial"/>
                         </a:rPr>
-                        <a:t>Diseñador de la experiencia virtual de aprendizaje</a:t>
+                        <a:t>Diseñador de la experiencia virtual de aprendizaje:</a:t>
                       </a:r>
                       <a:endParaRPr b="1" sz="1100" u="none" cap="none" strike="noStrike">
                         <a:latin typeface="Arial"/>
@@ -29997,7 +29997,7 @@
                           <a:cs typeface="Arial"/>
                           <a:sym typeface="Arial"/>
                         </a:rPr>
-                        <a:t>Corrección de estilo</a:t>
+                        <a:t>Corrección de estilo:</a:t>
                       </a:r>
                       <a:endParaRPr b="1" sz="1100" u="none" cap="none" strike="noStrike">
                         <a:latin typeface="Arial"/>
@@ -30092,7 +30092,7 @@
                           <a:cs typeface="Arial"/>
                           <a:sym typeface="Arial"/>
                         </a:rPr>
-                        <a:t>Validación pedagógica</a:t>
+                        <a:t>Validación pedagógica:</a:t>
                       </a:r>
                       <a:endParaRPr b="1" sz="1100" u="none" cap="none" strike="noStrike">
                         <a:latin typeface="Arial"/>
@@ -30187,7 +30187,7 @@
                           <a:cs typeface="Arial"/>
                           <a:sym typeface="Arial"/>
                         </a:rPr>
-                        <a:t>Diseño gráfico</a:t>
+                        <a:t>Diseño gráfico:</a:t>
                       </a:r>
                       <a:endParaRPr b="1" sz="1100" u="none" cap="none" strike="noStrike">
                         <a:latin typeface="Arial"/>
@@ -30282,7 +30282,7 @@
                           <a:cs typeface="Arial"/>
                           <a:sym typeface="Arial"/>
                         </a:rPr>
-                        <a:t>Disposición y ensamble</a:t>
+                        <a:t>Disposición y ensamble:</a:t>
                       </a:r>
                       <a:endParaRPr b="1" sz="1100" u="none" cap="none" strike="noStrike">
                         <a:latin typeface="Arial"/>
